--- a/docs/HQai-price-modelling.pptx
+++ b/docs/HQai-price-modelling.pptx
@@ -2499,7 +2499,7 @@
                 <a:ea typeface="Calibri" pitchFamily="34" charset="-122"/>
                 <a:cs typeface="Calibri" pitchFamily="34" charset="-120"/>
               </a:rPr>
-              <a:t>Partner briefing  -  June 2026</a:t>
+              <a:t>Partner briefing  -  July 2026</a:t>
             </a:r>
             <a:endParaRPr lang="en-US" sz="1200" dirty="0"/>
           </a:p>
@@ -18578,7 +18578,7 @@
                 <a:ea typeface="Calibri" pitchFamily="34" charset="-122"/>
                 <a:cs typeface="Calibri" pitchFamily="34" charset="-120"/>
               </a:rPr>
-              <a:t>Score CVs, run video and phone interviews, build a shortlist. A metered add-on, paid when you hire.</a:t>
+              <a:t>Write the ad, score CVs, run video and phone interviews, shortlist. A metered add-on, paid when you hire.</a:t>
             </a:r>
             <a:endParaRPr lang="en-US" sz="1300" dirty="0"/>
           </a:p>
